--- a/Ch15_Chamber_Church.pptx
+++ b/Ch15_Chamber_Church.pptx
@@ -4859,7 +4859,7 @@
                   </a:extLst>
                 </a:hlinkClick>
               </a:rPr>
-              <a:t>https://www.youtube.com/watch?v=2s1Gf3b2wRs</a:t>
+              <a:t>https://www.youtube.com/watch?v=2PLnla_I9gQ</a:t>
             </a:r>
             <a:endParaRPr lang="en-US" sz="1800" dirty="0"/>
           </a:p>
@@ -6537,7 +6537,7 @@
                   </a:extLst>
                 </a:hlinkClick>
               </a:rPr>
-              <a:t>https://www.youtube.com/watch?v=RCDI_Jy6bEk</a:t>
+              <a:t>https://www.youtube.com/watch?v=E7GzJl0fALg</a:t>
             </a:r>
             <a:endParaRPr lang="en-US" sz="1800" dirty="0"/>
           </a:p>
@@ -7009,7 +7009,7 @@
                   </a:extLst>
                 </a:hlinkClick>
               </a:rPr>
-              <a:t>https://www.youtube.com/watch?v=eZZMrP9bET4</a:t>
+              <a:t>https://www.youtube.com/watch?v=GCuaN-WjEWs</a:t>
             </a:r>
             <a:endParaRPr lang="en-US" sz="1800" dirty="0"/>
           </a:p>
@@ -9840,7 +9840,7 @@
                   </a:extLst>
                 </a:hlinkClick>
               </a:rPr>
-              <a:t>https://www.youtube.com/watch?v=6dJmqSi_qlM</a:t>
+              <a:t>https://www.youtube.com/watch?v=PV4VRPIwbYw</a:t>
             </a:r>
             <a:endParaRPr lang="en-US" sz="1800" dirty="0"/>
           </a:p>
@@ -10714,7 +10714,7 @@
                   </a:extLst>
                 </a:hlinkClick>
               </a:rPr>
-              <a:t>https://www.youtube.com/watch?v=1OyyJb3WNGI</a:t>
+              <a:t>https://www.youtube.com/watch?v=DsaYKQI6elQ</a:t>
             </a:r>
             <a:endParaRPr lang="en-US" sz="1800" dirty="0"/>
           </a:p>
@@ -14754,7 +14754,7 @@
                   </a:extLst>
                 </a:hlinkClick>
               </a:rPr>
-              <a:t>https://www.youtube.com/watch?v=bJfHoxZlMYw</a:t>
+              <a:t>https://www.youtube.com/watch?v=GH0PLm6Q8V4</a:t>
             </a:r>
             <a:endParaRPr lang="en-US" sz="1800" dirty="0"/>
           </a:p>
@@ -16834,7 +16834,7 @@
                   </a:extLst>
                 </a:hlinkClick>
               </a:rPr>
-              <a:t>https://www.youtube.com/watch?v=KkDj_rJCk6E</a:t>
+              <a:t>https://www.youtube.com/watch?v=b9x6eFXZqd0</a:t>
             </a:r>
             <a:endParaRPr lang="en-US" sz="1800" dirty="0"/>
           </a:p>
